--- a/ゲーム科1年/00_前期/ゲームプログラミングⅠ/10_入力システムと移動処理.pptx
+++ b/ゲーム科1年/00_前期/ゲームプログラミングⅠ/10_入力システムと移動処理.pptx
@@ -279,7 +279,7 @@
           <a:p>
             <a:fld id="{E9CC885B-4903-4D54-9A93-00025F12DED9}" type="datetimeFigureOut">
               <a:rPr kumimoji="1" lang="ja-JP" altLang="en-US" smtClean="0"/>
-              <a:t>2024/9/4</a:t>
+              <a:t>2025/1/6</a:t>
             </a:fld>
             <a:endParaRPr kumimoji="1" lang="ja-JP" altLang="en-US"/>
           </a:p>
@@ -509,7 +509,7 @@
           <a:p>
             <a:fld id="{E9CC885B-4903-4D54-9A93-00025F12DED9}" type="datetimeFigureOut">
               <a:rPr kumimoji="1" lang="ja-JP" altLang="en-US" smtClean="0"/>
-              <a:t>2024/9/4</a:t>
+              <a:t>2025/1/6</a:t>
             </a:fld>
             <a:endParaRPr kumimoji="1" lang="ja-JP" altLang="en-US"/>
           </a:p>
@@ -749,7 +749,7 @@
           <a:p>
             <a:fld id="{E9CC885B-4903-4D54-9A93-00025F12DED9}" type="datetimeFigureOut">
               <a:rPr kumimoji="1" lang="ja-JP" altLang="en-US" smtClean="0"/>
-              <a:t>2024/9/4</a:t>
+              <a:t>2025/1/6</a:t>
             </a:fld>
             <a:endParaRPr kumimoji="1" lang="ja-JP" altLang="en-US"/>
           </a:p>
@@ -979,7 +979,7 @@
           <a:p>
             <a:fld id="{E9CC885B-4903-4D54-9A93-00025F12DED9}" type="datetimeFigureOut">
               <a:rPr kumimoji="1" lang="ja-JP" altLang="en-US" smtClean="0"/>
-              <a:t>2024/9/4</a:t>
+              <a:t>2025/1/6</a:t>
             </a:fld>
             <a:endParaRPr kumimoji="1" lang="ja-JP" altLang="en-US"/>
           </a:p>
@@ -1254,7 +1254,7 @@
           <a:p>
             <a:fld id="{E9CC885B-4903-4D54-9A93-00025F12DED9}" type="datetimeFigureOut">
               <a:rPr kumimoji="1" lang="ja-JP" altLang="en-US" smtClean="0"/>
-              <a:t>2024/9/4</a:t>
+              <a:t>2025/1/6</a:t>
             </a:fld>
             <a:endParaRPr kumimoji="1" lang="ja-JP" altLang="en-US"/>
           </a:p>
@@ -1583,7 +1583,7 @@
           <a:p>
             <a:fld id="{E9CC885B-4903-4D54-9A93-00025F12DED9}" type="datetimeFigureOut">
               <a:rPr kumimoji="1" lang="ja-JP" altLang="en-US" smtClean="0"/>
-              <a:t>2024/9/4</a:t>
+              <a:t>2025/1/6</a:t>
             </a:fld>
             <a:endParaRPr kumimoji="1" lang="ja-JP" altLang="en-US"/>
           </a:p>
@@ -2059,7 +2059,7 @@
           <a:p>
             <a:fld id="{E9CC885B-4903-4D54-9A93-00025F12DED9}" type="datetimeFigureOut">
               <a:rPr kumimoji="1" lang="ja-JP" altLang="en-US" smtClean="0"/>
-              <a:t>2024/9/4</a:t>
+              <a:t>2025/1/6</a:t>
             </a:fld>
             <a:endParaRPr kumimoji="1" lang="ja-JP" altLang="en-US"/>
           </a:p>
@@ -2200,7 +2200,7 @@
           <a:p>
             <a:fld id="{E9CC885B-4903-4D54-9A93-00025F12DED9}" type="datetimeFigureOut">
               <a:rPr kumimoji="1" lang="ja-JP" altLang="en-US" smtClean="0"/>
-              <a:t>2024/9/4</a:t>
+              <a:t>2025/1/6</a:t>
             </a:fld>
             <a:endParaRPr kumimoji="1" lang="ja-JP" altLang="en-US"/>
           </a:p>
@@ -2313,7 +2313,7 @@
           <a:p>
             <a:fld id="{E9CC885B-4903-4D54-9A93-00025F12DED9}" type="datetimeFigureOut">
               <a:rPr kumimoji="1" lang="ja-JP" altLang="en-US" smtClean="0"/>
-              <a:t>2024/9/4</a:t>
+              <a:t>2025/1/6</a:t>
             </a:fld>
             <a:endParaRPr kumimoji="1" lang="ja-JP" altLang="en-US"/>
           </a:p>
@@ -2656,7 +2656,7 @@
           <a:p>
             <a:fld id="{E9CC885B-4903-4D54-9A93-00025F12DED9}" type="datetimeFigureOut">
               <a:rPr kumimoji="1" lang="ja-JP" altLang="en-US" smtClean="0"/>
-              <a:t>2024/9/4</a:t>
+              <a:t>2025/1/6</a:t>
             </a:fld>
             <a:endParaRPr kumimoji="1" lang="ja-JP" altLang="en-US"/>
           </a:p>
@@ -2944,7 +2944,7 @@
           <a:p>
             <a:fld id="{E9CC885B-4903-4D54-9A93-00025F12DED9}" type="datetimeFigureOut">
               <a:rPr kumimoji="1" lang="ja-JP" altLang="en-US" smtClean="0"/>
-              <a:t>2024/9/4</a:t>
+              <a:t>2025/1/6</a:t>
             </a:fld>
             <a:endParaRPr kumimoji="1" lang="ja-JP" altLang="en-US"/>
           </a:p>
@@ -3217,7 +3217,7 @@
           <a:p>
             <a:fld id="{E9CC885B-4903-4D54-9A93-00025F12DED9}" type="datetimeFigureOut">
               <a:rPr kumimoji="1" lang="ja-JP" altLang="en-US" smtClean="0"/>
-              <a:t>2024/9/4</a:t>
+              <a:t>2025/1/6</a:t>
             </a:fld>
             <a:endParaRPr kumimoji="1" lang="ja-JP" altLang="en-US"/>
           </a:p>
@@ -5013,7 +5013,7 @@
         <p:spPr>
           <a:xfrm>
             <a:off x="567542" y="1216429"/>
-            <a:ext cx="6819496" cy="830997"/>
+            <a:ext cx="8050602" cy="830997"/>
           </a:xfrm>
           <a:prstGeom prst="rect">
             <a:avLst/>
@@ -5043,7 +5043,15 @@
           <a:p>
             <a:r>
               <a:rPr lang="ja-JP" altLang="en-US" sz="2400" dirty="0"/>
-              <a:t>（最初は動いていないということ）</a:t>
+              <a:t>（移動量</a:t>
+            </a:r>
+            <a:r>
+              <a:rPr lang="en-US" altLang="ja-JP" sz="2400" dirty="0"/>
+              <a:t>0</a:t>
+            </a:r>
+            <a:r>
+              <a:rPr lang="ja-JP" altLang="en-US" sz="2400" dirty="0"/>
+              <a:t>ということは最初は動いていないということ）</a:t>
             </a:r>
             <a:endParaRPr kumimoji="1" lang="en-US" altLang="ja-JP" sz="2400" dirty="0"/>
           </a:p>
@@ -5051,10 +5059,10 @@
       </p:sp>
       <p:pic>
         <p:nvPicPr>
-          <p:cNvPr id="3" name="図 2">
-            <a:extLst>
-              <a:ext uri="{FF2B5EF4-FFF2-40B4-BE49-F238E27FC236}">
-                <a16:creationId xmlns:a16="http://schemas.microsoft.com/office/drawing/2014/main" id="{6332C7DC-F28D-445D-A970-EF1FC0A576FE}"/>
+          <p:cNvPr id="5" name="図 4">
+            <a:extLst>
+              <a:ext uri="{FF2B5EF4-FFF2-40B4-BE49-F238E27FC236}">
+                <a16:creationId xmlns:a16="http://schemas.microsoft.com/office/drawing/2014/main" id="{87C5C838-8128-4ECB-88D7-486A0D554BC3}"/>
               </a:ext>
             </a:extLst>
           </p:cNvPr>
@@ -5064,21 +5072,15 @@
           <p:nvPr/>
         </p:nvPicPr>
         <p:blipFill>
-          <a:blip r:embed="rId2">
-            <a:extLst>
-              <a:ext uri="{28A0092B-C50C-407E-A947-70E740481C1C}">
-                <a14:useLocalDpi xmlns:a14="http://schemas.microsoft.com/office/drawing/2010/main" val="0"/>
-              </a:ext>
-            </a:extLst>
-          </a:blip>
+          <a:blip r:embed="rId2"/>
           <a:stretch>
             <a:fillRect/>
           </a:stretch>
         </p:blipFill>
         <p:spPr>
           <a:xfrm>
-            <a:off x="567542" y="2187126"/>
-            <a:ext cx="10131940" cy="2623449"/>
+            <a:off x="567541" y="2187125"/>
+            <a:ext cx="9239601" cy="2478007"/>
           </a:xfrm>
           <a:prstGeom prst="rect">
             <a:avLst/>

--- a/ゲーム科1年/00_前期/ゲームプログラミングⅠ/10_入力システムと移動処理.pptx
+++ b/ゲーム科1年/00_前期/ゲームプログラミングⅠ/10_入力システムと移動処理.pptx
@@ -279,7 +279,7 @@
           <a:p>
             <a:fld id="{E9CC885B-4903-4D54-9A93-00025F12DED9}" type="datetimeFigureOut">
               <a:rPr kumimoji="1" lang="ja-JP" altLang="en-US" smtClean="0"/>
-              <a:t>2025/1/6</a:t>
+              <a:t>2025/3/3</a:t>
             </a:fld>
             <a:endParaRPr kumimoji="1" lang="ja-JP" altLang="en-US"/>
           </a:p>
@@ -509,7 +509,7 @@
           <a:p>
             <a:fld id="{E9CC885B-4903-4D54-9A93-00025F12DED9}" type="datetimeFigureOut">
               <a:rPr kumimoji="1" lang="ja-JP" altLang="en-US" smtClean="0"/>
-              <a:t>2025/1/6</a:t>
+              <a:t>2025/3/3</a:t>
             </a:fld>
             <a:endParaRPr kumimoji="1" lang="ja-JP" altLang="en-US"/>
           </a:p>
@@ -749,7 +749,7 @@
           <a:p>
             <a:fld id="{E9CC885B-4903-4D54-9A93-00025F12DED9}" type="datetimeFigureOut">
               <a:rPr kumimoji="1" lang="ja-JP" altLang="en-US" smtClean="0"/>
-              <a:t>2025/1/6</a:t>
+              <a:t>2025/3/3</a:t>
             </a:fld>
             <a:endParaRPr kumimoji="1" lang="ja-JP" altLang="en-US"/>
           </a:p>
@@ -979,7 +979,7 @@
           <a:p>
             <a:fld id="{E9CC885B-4903-4D54-9A93-00025F12DED9}" type="datetimeFigureOut">
               <a:rPr kumimoji="1" lang="ja-JP" altLang="en-US" smtClean="0"/>
-              <a:t>2025/1/6</a:t>
+              <a:t>2025/3/3</a:t>
             </a:fld>
             <a:endParaRPr kumimoji="1" lang="ja-JP" altLang="en-US"/>
           </a:p>
@@ -1254,7 +1254,7 @@
           <a:p>
             <a:fld id="{E9CC885B-4903-4D54-9A93-00025F12DED9}" type="datetimeFigureOut">
               <a:rPr kumimoji="1" lang="ja-JP" altLang="en-US" smtClean="0"/>
-              <a:t>2025/1/6</a:t>
+              <a:t>2025/3/3</a:t>
             </a:fld>
             <a:endParaRPr kumimoji="1" lang="ja-JP" altLang="en-US"/>
           </a:p>
@@ -1583,7 +1583,7 @@
           <a:p>
             <a:fld id="{E9CC885B-4903-4D54-9A93-00025F12DED9}" type="datetimeFigureOut">
               <a:rPr kumimoji="1" lang="ja-JP" altLang="en-US" smtClean="0"/>
-              <a:t>2025/1/6</a:t>
+              <a:t>2025/3/3</a:t>
             </a:fld>
             <a:endParaRPr kumimoji="1" lang="ja-JP" altLang="en-US"/>
           </a:p>
@@ -2059,7 +2059,7 @@
           <a:p>
             <a:fld id="{E9CC885B-4903-4D54-9A93-00025F12DED9}" type="datetimeFigureOut">
               <a:rPr kumimoji="1" lang="ja-JP" altLang="en-US" smtClean="0"/>
-              <a:t>2025/1/6</a:t>
+              <a:t>2025/3/3</a:t>
             </a:fld>
             <a:endParaRPr kumimoji="1" lang="ja-JP" altLang="en-US"/>
           </a:p>
@@ -2200,7 +2200,7 @@
           <a:p>
             <a:fld id="{E9CC885B-4903-4D54-9A93-00025F12DED9}" type="datetimeFigureOut">
               <a:rPr kumimoji="1" lang="ja-JP" altLang="en-US" smtClean="0"/>
-              <a:t>2025/1/6</a:t>
+              <a:t>2025/3/3</a:t>
             </a:fld>
             <a:endParaRPr kumimoji="1" lang="ja-JP" altLang="en-US"/>
           </a:p>
@@ -2313,7 +2313,7 @@
           <a:p>
             <a:fld id="{E9CC885B-4903-4D54-9A93-00025F12DED9}" type="datetimeFigureOut">
               <a:rPr kumimoji="1" lang="ja-JP" altLang="en-US" smtClean="0"/>
-              <a:t>2025/1/6</a:t>
+              <a:t>2025/3/3</a:t>
             </a:fld>
             <a:endParaRPr kumimoji="1" lang="ja-JP" altLang="en-US"/>
           </a:p>
@@ -2656,7 +2656,7 @@
           <a:p>
             <a:fld id="{E9CC885B-4903-4D54-9A93-00025F12DED9}" type="datetimeFigureOut">
               <a:rPr kumimoji="1" lang="ja-JP" altLang="en-US" smtClean="0"/>
-              <a:t>2025/1/6</a:t>
+              <a:t>2025/3/3</a:t>
             </a:fld>
             <a:endParaRPr kumimoji="1" lang="ja-JP" altLang="en-US"/>
           </a:p>
@@ -2944,7 +2944,7 @@
           <a:p>
             <a:fld id="{E9CC885B-4903-4D54-9A93-00025F12DED9}" type="datetimeFigureOut">
               <a:rPr kumimoji="1" lang="ja-JP" altLang="en-US" smtClean="0"/>
-              <a:t>2025/1/6</a:t>
+              <a:t>2025/3/3</a:t>
             </a:fld>
             <a:endParaRPr kumimoji="1" lang="ja-JP" altLang="en-US"/>
           </a:p>
@@ -3217,7 +3217,7 @@
           <a:p>
             <a:fld id="{E9CC885B-4903-4D54-9A93-00025F12DED9}" type="datetimeFigureOut">
               <a:rPr kumimoji="1" lang="ja-JP" altLang="en-US" smtClean="0"/>
-              <a:t>2025/1/6</a:t>
+              <a:t>2025/3/3</a:t>
             </a:fld>
             <a:endParaRPr kumimoji="1" lang="ja-JP" altLang="en-US"/>
           </a:p>
@@ -4808,7 +4808,7 @@
         <p:spPr>
           <a:xfrm>
             <a:off x="567542" y="1216429"/>
-            <a:ext cx="6295313" cy="461665"/>
+            <a:ext cx="6369051" cy="461665"/>
           </a:xfrm>
           <a:prstGeom prst="rect">
             <a:avLst/>
@@ -4826,7 +4826,11 @@
               <a:t>まず</a:t>
             </a:r>
             <a:r>
-              <a:rPr kumimoji="1" lang="en-US" altLang="ja-JP" sz="2400" dirty="0" err="1"/>
+              <a:rPr kumimoji="1" lang="en-US" altLang="ja-JP" sz="2400" b="1" dirty="0" err="1">
+                <a:solidFill>
+                  <a:srgbClr val="FF0000"/>
+                </a:solidFill>
+              </a:rPr>
               <a:t>Player.h</a:t>
             </a:r>
             <a:r>
@@ -4834,12 +4838,24 @@
               <a:t>に</a:t>
             </a:r>
             <a:r>
-              <a:rPr kumimoji="1" lang="en-US" altLang="ja-JP" sz="2400" dirty="0"/>
+              <a:rPr kumimoji="1" lang="en-US" altLang="ja-JP" sz="2400" b="1" dirty="0">
+                <a:solidFill>
+                  <a:srgbClr val="0070C0"/>
+                </a:solidFill>
+              </a:rPr>
               <a:t>Step</a:t>
             </a:r>
             <a:r>
+              <a:rPr kumimoji="1" lang="ja-JP" altLang="en-US" sz="2400" b="1" dirty="0">
+                <a:solidFill>
+                  <a:srgbClr val="0070C0"/>
+                </a:solidFill>
+              </a:rPr>
+              <a:t>関数</a:t>
+            </a:r>
+            <a:r>
               <a:rPr kumimoji="1" lang="ja-JP" altLang="en-US" sz="2400" dirty="0"/>
-              <a:t>関数を追加しましょう。</a:t>
+              <a:t>を追加しましょう。</a:t>
             </a:r>
             <a:endParaRPr kumimoji="1" lang="en-US" altLang="ja-JP" sz="2400" dirty="0"/>
           </a:p>
@@ -5497,12 +5513,24 @@
               <a:t>移動処理（座標に移動量を加算する処理）は</a:t>
             </a:r>
             <a:r>
-              <a:rPr kumimoji="1" lang="en-US" altLang="ja-JP" sz="2400" dirty="0"/>
+              <a:rPr kumimoji="1" lang="en-US" altLang="ja-JP" sz="2400" b="1" dirty="0">
+                <a:solidFill>
+                  <a:srgbClr val="0070C0"/>
+                </a:solidFill>
+              </a:rPr>
               <a:t>Update</a:t>
             </a:r>
             <a:r>
+              <a:rPr kumimoji="1" lang="ja-JP" altLang="en-US" sz="2400" b="1" dirty="0">
+                <a:solidFill>
+                  <a:srgbClr val="0070C0"/>
+                </a:solidFill>
+              </a:rPr>
+              <a:t>関数</a:t>
+            </a:r>
+            <a:r>
               <a:rPr kumimoji="1" lang="ja-JP" altLang="en-US" sz="2400" dirty="0"/>
-              <a:t>関数に書きます。</a:t>
+              <a:t>に書きます。</a:t>
             </a:r>
             <a:endParaRPr kumimoji="1" lang="en-US" altLang="ja-JP" sz="2400" dirty="0"/>
           </a:p>
@@ -5624,7 +5652,7 @@
         <p:spPr>
           <a:xfrm>
             <a:off x="567542" y="1216429"/>
-            <a:ext cx="8502649" cy="461665"/>
+            <a:ext cx="8619667" cy="461665"/>
           </a:xfrm>
           <a:prstGeom prst="rect">
             <a:avLst/>
@@ -5646,7 +5674,11 @@
               <a:t>フォルダを作成して、</a:t>
             </a:r>
             <a:r>
-              <a:rPr kumimoji="1" lang="en-US" altLang="ja-JP" sz="2400" dirty="0"/>
+              <a:rPr kumimoji="1" lang="en-US" altLang="ja-JP" sz="2400" b="1" dirty="0">
+                <a:solidFill>
+                  <a:srgbClr val="FF0000"/>
+                </a:solidFill>
+              </a:rPr>
               <a:t>Input.cpp/.h</a:t>
             </a:r>
             <a:r>
@@ -5809,7 +5841,7 @@
         <p:spPr>
           <a:xfrm>
             <a:off x="567542" y="1216429"/>
-            <a:ext cx="7031092" cy="830997"/>
+            <a:ext cx="7111242" cy="830997"/>
           </a:xfrm>
           <a:prstGeom prst="rect">
             <a:avLst/>
@@ -5823,7 +5855,11 @@
           <a:lstStyle/>
           <a:p>
             <a:r>
-              <a:rPr kumimoji="1" lang="en-US" altLang="ja-JP" sz="2400" dirty="0"/>
+              <a:rPr kumimoji="1" lang="en-US" altLang="ja-JP" sz="2400" b="1" dirty="0">
+                <a:solidFill>
+                  <a:srgbClr val="FF0000"/>
+                </a:solidFill>
+              </a:rPr>
               <a:t>Main.cpp</a:t>
             </a:r>
             <a:r>
@@ -6149,7 +6185,7 @@
         <p:spPr>
           <a:xfrm>
             <a:off x="567542" y="1216429"/>
-            <a:ext cx="4870244" cy="461665"/>
+            <a:ext cx="4942379" cy="461665"/>
           </a:xfrm>
           <a:prstGeom prst="rect">
             <a:avLst/>
@@ -6163,7 +6199,11 @@
           <a:lstStyle/>
           <a:p>
             <a:r>
-              <a:rPr kumimoji="1" lang="en-US" altLang="ja-JP" sz="2400" dirty="0" err="1"/>
+              <a:rPr kumimoji="1" lang="en-US" altLang="ja-JP" sz="2400" b="1" dirty="0" err="1">
+                <a:solidFill>
+                  <a:srgbClr val="FF0000"/>
+                </a:solidFill>
+              </a:rPr>
               <a:t>Input.h</a:t>
             </a:r>
             <a:r>
@@ -6290,7 +6330,7 @@
         <p:spPr>
           <a:xfrm>
             <a:off x="567542" y="1216429"/>
-            <a:ext cx="4591321" cy="461665"/>
+            <a:ext cx="4684296" cy="461665"/>
           </a:xfrm>
           <a:prstGeom prst="rect">
             <a:avLst/>
@@ -6304,7 +6344,11 @@
           <a:lstStyle/>
           <a:p>
             <a:r>
-              <a:rPr kumimoji="1" lang="en-US" altLang="ja-JP" sz="2400" dirty="0"/>
+              <a:rPr kumimoji="1" lang="en-US" altLang="ja-JP" sz="2400" b="1" dirty="0">
+                <a:solidFill>
+                  <a:srgbClr val="FF0000"/>
+                </a:solidFill>
+              </a:rPr>
               <a:t>Input.cpp</a:t>
             </a:r>
             <a:r>
@@ -6431,7 +6475,7 @@
         <p:spPr>
           <a:xfrm>
             <a:off x="567542" y="1216429"/>
-            <a:ext cx="2129109" cy="461665"/>
+            <a:ext cx="2222083" cy="461665"/>
           </a:xfrm>
           <a:prstGeom prst="rect">
             <a:avLst/>
@@ -6445,7 +6489,11 @@
           <a:lstStyle/>
           <a:p>
             <a:r>
-              <a:rPr kumimoji="1" lang="en-US" altLang="ja-JP" sz="2400" dirty="0"/>
+              <a:rPr kumimoji="1" lang="en-US" altLang="ja-JP" sz="2400" b="1" dirty="0">
+                <a:solidFill>
+                  <a:srgbClr val="FF0000"/>
+                </a:solidFill>
+              </a:rPr>
               <a:t>Input.cpp</a:t>
             </a:r>
             <a:r>
@@ -6572,7 +6620,7 @@
         <p:spPr>
           <a:xfrm>
             <a:off x="567542" y="1216429"/>
-            <a:ext cx="2129109" cy="461665"/>
+            <a:ext cx="2222083" cy="461665"/>
           </a:xfrm>
           <a:prstGeom prst="rect">
             <a:avLst/>
@@ -6586,7 +6634,11 @@
           <a:lstStyle/>
           <a:p>
             <a:r>
-              <a:rPr kumimoji="1" lang="en-US" altLang="ja-JP" sz="2400" dirty="0"/>
+              <a:rPr kumimoji="1" lang="en-US" altLang="ja-JP" sz="2400" b="1" dirty="0">
+                <a:solidFill>
+                  <a:srgbClr val="FF0000"/>
+                </a:solidFill>
+              </a:rPr>
               <a:t>Input.cpp</a:t>
             </a:r>
             <a:r>
@@ -7096,7 +7148,7 @@
         <p:spPr>
           <a:xfrm>
             <a:off x="567542" y="1216429"/>
-            <a:ext cx="8417689" cy="461665"/>
+            <a:ext cx="8528297" cy="461665"/>
           </a:xfrm>
           <a:prstGeom prst="rect">
             <a:avLst/>
@@ -7110,12 +7162,24 @@
           <a:lstStyle/>
           <a:p>
             <a:r>
-              <a:rPr kumimoji="1" lang="en-US" altLang="ja-JP" sz="2400" dirty="0" err="1"/>
+              <a:rPr kumimoji="1" lang="en-US" altLang="ja-JP" sz="2400" b="1" dirty="0" err="1">
+                <a:solidFill>
+                  <a:srgbClr val="0070C0"/>
+                </a:solidFill>
+              </a:rPr>
               <a:t>UpdateInput</a:t>
             </a:r>
             <a:r>
+              <a:rPr kumimoji="1" lang="ja-JP" altLang="en-US" sz="2400" b="1" dirty="0">
+                <a:solidFill>
+                  <a:srgbClr val="0070C0"/>
+                </a:solidFill>
+              </a:rPr>
+              <a:t>関数</a:t>
+            </a:r>
+            <a:r>
               <a:rPr kumimoji="1" lang="ja-JP" altLang="en-US" sz="2400" dirty="0"/>
-              <a:t>関数で、入力に対応したフラグを設定します。</a:t>
+              <a:t>で、入力に対応したフラグを設定します。</a:t>
             </a:r>
             <a:endParaRPr kumimoji="1" lang="en-US" altLang="ja-JP" sz="2400" dirty="0"/>
           </a:p>
@@ -7251,12 +7315,24 @@
           <a:lstStyle/>
           <a:p>
             <a:r>
-              <a:rPr kumimoji="1" lang="en-US" altLang="ja-JP" sz="2400" dirty="0"/>
+              <a:rPr kumimoji="1" lang="en-US" altLang="ja-JP" sz="2400" b="1" dirty="0">
+                <a:solidFill>
+                  <a:srgbClr val="0070C0"/>
+                </a:solidFill>
+              </a:rPr>
               <a:t>And</a:t>
             </a:r>
             <a:r>
+              <a:rPr kumimoji="1" lang="ja-JP" altLang="en-US" sz="2400" b="1" dirty="0">
+                <a:solidFill>
+                  <a:srgbClr val="0070C0"/>
+                </a:solidFill>
+              </a:rPr>
+              <a:t>演算</a:t>
+            </a:r>
+            <a:r>
               <a:rPr kumimoji="1" lang="ja-JP" altLang="en-US" sz="2400" dirty="0"/>
-              <a:t>演算すれば、入力されているキーを判定できます。</a:t>
+              <a:t>すれば、入力されているキーを判定できます。</a:t>
             </a:r>
             <a:endParaRPr kumimoji="1" lang="en-US" altLang="ja-JP" sz="2400" dirty="0"/>
           </a:p>

--- a/ゲーム科1年/00_前期/ゲームプログラミングⅠ/10_入力システムと移動処理.pptx
+++ b/ゲーム科1年/00_前期/ゲームプログラミングⅠ/10_入力システムと移動処理.pptx
@@ -279,7 +279,7 @@
           <a:p>
             <a:fld id="{E9CC885B-4903-4D54-9A93-00025F12DED9}" type="datetimeFigureOut">
               <a:rPr kumimoji="1" lang="ja-JP" altLang="en-US" smtClean="0"/>
-              <a:t>2025/3/3</a:t>
+              <a:t>2026/6/4</a:t>
             </a:fld>
             <a:endParaRPr kumimoji="1" lang="ja-JP" altLang="en-US"/>
           </a:p>
@@ -509,7 +509,7 @@
           <a:p>
             <a:fld id="{E9CC885B-4903-4D54-9A93-00025F12DED9}" type="datetimeFigureOut">
               <a:rPr kumimoji="1" lang="ja-JP" altLang="en-US" smtClean="0"/>
-              <a:t>2025/3/3</a:t>
+              <a:t>2026/6/4</a:t>
             </a:fld>
             <a:endParaRPr kumimoji="1" lang="ja-JP" altLang="en-US"/>
           </a:p>
@@ -749,7 +749,7 @@
           <a:p>
             <a:fld id="{E9CC885B-4903-4D54-9A93-00025F12DED9}" type="datetimeFigureOut">
               <a:rPr kumimoji="1" lang="ja-JP" altLang="en-US" smtClean="0"/>
-              <a:t>2025/3/3</a:t>
+              <a:t>2026/6/4</a:t>
             </a:fld>
             <a:endParaRPr kumimoji="1" lang="ja-JP" altLang="en-US"/>
           </a:p>
@@ -979,7 +979,7 @@
           <a:p>
             <a:fld id="{E9CC885B-4903-4D54-9A93-00025F12DED9}" type="datetimeFigureOut">
               <a:rPr kumimoji="1" lang="ja-JP" altLang="en-US" smtClean="0"/>
-              <a:t>2025/3/3</a:t>
+              <a:t>2026/6/4</a:t>
             </a:fld>
             <a:endParaRPr kumimoji="1" lang="ja-JP" altLang="en-US"/>
           </a:p>
@@ -1254,7 +1254,7 @@
           <a:p>
             <a:fld id="{E9CC885B-4903-4D54-9A93-00025F12DED9}" type="datetimeFigureOut">
               <a:rPr kumimoji="1" lang="ja-JP" altLang="en-US" smtClean="0"/>
-              <a:t>2025/3/3</a:t>
+              <a:t>2026/6/4</a:t>
             </a:fld>
             <a:endParaRPr kumimoji="1" lang="ja-JP" altLang="en-US"/>
           </a:p>
@@ -1583,7 +1583,7 @@
           <a:p>
             <a:fld id="{E9CC885B-4903-4D54-9A93-00025F12DED9}" type="datetimeFigureOut">
               <a:rPr kumimoji="1" lang="ja-JP" altLang="en-US" smtClean="0"/>
-              <a:t>2025/3/3</a:t>
+              <a:t>2026/6/4</a:t>
             </a:fld>
             <a:endParaRPr kumimoji="1" lang="ja-JP" altLang="en-US"/>
           </a:p>
@@ -2059,7 +2059,7 @@
           <a:p>
             <a:fld id="{E9CC885B-4903-4D54-9A93-00025F12DED9}" type="datetimeFigureOut">
               <a:rPr kumimoji="1" lang="ja-JP" altLang="en-US" smtClean="0"/>
-              <a:t>2025/3/3</a:t>
+              <a:t>2026/6/4</a:t>
             </a:fld>
             <a:endParaRPr kumimoji="1" lang="ja-JP" altLang="en-US"/>
           </a:p>
@@ -2200,7 +2200,7 @@
           <a:p>
             <a:fld id="{E9CC885B-4903-4D54-9A93-00025F12DED9}" type="datetimeFigureOut">
               <a:rPr kumimoji="1" lang="ja-JP" altLang="en-US" smtClean="0"/>
-              <a:t>2025/3/3</a:t>
+              <a:t>2026/6/4</a:t>
             </a:fld>
             <a:endParaRPr kumimoji="1" lang="ja-JP" altLang="en-US"/>
           </a:p>
@@ -2313,7 +2313,7 @@
           <a:p>
             <a:fld id="{E9CC885B-4903-4D54-9A93-00025F12DED9}" type="datetimeFigureOut">
               <a:rPr kumimoji="1" lang="ja-JP" altLang="en-US" smtClean="0"/>
-              <a:t>2025/3/3</a:t>
+              <a:t>2026/6/4</a:t>
             </a:fld>
             <a:endParaRPr kumimoji="1" lang="ja-JP" altLang="en-US"/>
           </a:p>
@@ -2656,7 +2656,7 @@
           <a:p>
             <a:fld id="{E9CC885B-4903-4D54-9A93-00025F12DED9}" type="datetimeFigureOut">
               <a:rPr kumimoji="1" lang="ja-JP" altLang="en-US" smtClean="0"/>
-              <a:t>2025/3/3</a:t>
+              <a:t>2026/6/4</a:t>
             </a:fld>
             <a:endParaRPr kumimoji="1" lang="ja-JP" altLang="en-US"/>
           </a:p>
@@ -2944,7 +2944,7 @@
           <a:p>
             <a:fld id="{E9CC885B-4903-4D54-9A93-00025F12DED9}" type="datetimeFigureOut">
               <a:rPr kumimoji="1" lang="ja-JP" altLang="en-US" smtClean="0"/>
-              <a:t>2025/3/3</a:t>
+              <a:t>2026/6/4</a:t>
             </a:fld>
             <a:endParaRPr kumimoji="1" lang="ja-JP" altLang="en-US"/>
           </a:p>
@@ -3217,7 +3217,7 @@
           <a:p>
             <a:fld id="{E9CC885B-4903-4D54-9A93-00025F12DED9}" type="datetimeFigureOut">
               <a:rPr kumimoji="1" lang="ja-JP" altLang="en-US" smtClean="0"/>
-              <a:t>2025/3/3</a:t>
+              <a:t>2026/6/4</a:t>
             </a:fld>
             <a:endParaRPr kumimoji="1" lang="ja-JP" altLang="en-US"/>
           </a:p>
@@ -4594,7 +4594,7 @@
         <p:spPr>
           <a:xfrm>
             <a:off x="567542" y="1216429"/>
-            <a:ext cx="10341293" cy="4524315"/>
+            <a:ext cx="9185528" cy="1200329"/>
           </a:xfrm>
           <a:prstGeom prst="rect">
             <a:avLst/>
@@ -4638,9 +4638,6 @@
               <a:rPr lang="ja-JP" altLang="en-US" sz="2400" dirty="0"/>
               <a:t>を追加します。</a:t>
             </a:r>
-            <a:endParaRPr lang="en-US" altLang="ja-JP" sz="2400" dirty="0"/>
-          </a:p>
-          <a:p>
             <a:endParaRPr kumimoji="1" lang="en-US" altLang="ja-JP" sz="2400" dirty="0"/>
           </a:p>
           <a:p>
@@ -4651,13 +4648,6 @@
             <a:r>
               <a:rPr lang="ja-JP" altLang="en-US" sz="2400" dirty="0"/>
               <a:t>処理では、</a:t>
-            </a:r>
-            <a:endParaRPr lang="en-US" altLang="ja-JP" sz="2400" dirty="0"/>
-          </a:p>
-          <a:p>
-            <a:r>
-              <a:rPr lang="ja-JP" altLang="en-US" sz="2400" dirty="0"/>
-              <a:t>キャラクターなど、</a:t>
             </a:r>
             <a:r>
               <a:rPr lang="ja-JP" altLang="en-US" sz="2400" b="1" dirty="0">
@@ -4665,64 +4655,15 @@
                   <a:srgbClr val="FF0000"/>
                 </a:solidFill>
               </a:rPr>
-              <a:t>各ゲーム中のオブジェクトを１フレーム進める処理</a:t>
+              <a:t>ゲーム中のものを１つ進める処理</a:t>
             </a:r>
             <a:r>
               <a:rPr lang="ja-JP" altLang="en-US" sz="2400" dirty="0"/>
               <a:t>を</a:t>
             </a:r>
-            <a:endParaRPr lang="en-US" altLang="ja-JP" sz="2400" dirty="0"/>
-          </a:p>
-          <a:p>
             <a:r>
               <a:rPr kumimoji="1" lang="ja-JP" altLang="en-US" sz="2400" dirty="0"/>
               <a:t>実装します。</a:t>
-            </a:r>
-            <a:endParaRPr kumimoji="1" lang="en-US" altLang="ja-JP" sz="2400" dirty="0"/>
-          </a:p>
-          <a:p>
-            <a:endParaRPr lang="en-US" altLang="ja-JP" sz="2400" dirty="0"/>
-          </a:p>
-          <a:p>
-            <a:r>
-              <a:rPr kumimoji="1" lang="ja-JP" altLang="en-US" sz="2400" b="1" dirty="0">
-                <a:solidFill>
-                  <a:srgbClr val="FF0000"/>
-                </a:solidFill>
-              </a:rPr>
-              <a:t>■主に実装する処理</a:t>
-            </a:r>
-            <a:endParaRPr kumimoji="1" lang="en-US" altLang="ja-JP" sz="2400" b="1" dirty="0">
-              <a:solidFill>
-                <a:srgbClr val="FF0000"/>
-              </a:solidFill>
-            </a:endParaRPr>
-          </a:p>
-          <a:p>
-            <a:r>
-              <a:rPr lang="ja-JP" altLang="en-US" sz="2400" dirty="0"/>
-              <a:t>・変数のリセット</a:t>
-            </a:r>
-            <a:endParaRPr lang="en-US" altLang="ja-JP" sz="2400" dirty="0"/>
-          </a:p>
-          <a:p>
-            <a:r>
-              <a:rPr kumimoji="1" lang="ja-JP" altLang="en-US" sz="2400" dirty="0"/>
-              <a:t>・入力処理</a:t>
-            </a:r>
-            <a:endParaRPr kumimoji="1" lang="en-US" altLang="ja-JP" sz="2400" dirty="0"/>
-          </a:p>
-          <a:p>
-            <a:r>
-              <a:rPr lang="ja-JP" altLang="en-US" sz="2400" dirty="0"/>
-              <a:t>・移動量の設定</a:t>
-            </a:r>
-            <a:endParaRPr lang="en-US" altLang="ja-JP" sz="2400" dirty="0"/>
-          </a:p>
-          <a:p>
-            <a:r>
-              <a:rPr kumimoji="1" lang="ja-JP" altLang="en-US" sz="2400" dirty="0"/>
-              <a:t>など</a:t>
             </a:r>
             <a:endParaRPr kumimoji="1" lang="en-US" altLang="ja-JP" sz="2400" dirty="0"/>
           </a:p>

--- a/ゲーム科1年/00_前期/ゲームプログラミングⅠ/10_入力システムと移動処理.pptx
+++ b/ゲーム科1年/00_前期/ゲームプログラミングⅠ/10_入力システムと移動処理.pptx
@@ -279,7 +279,7 @@
           <a:p>
             <a:fld id="{E9CC885B-4903-4D54-9A93-00025F12DED9}" type="datetimeFigureOut">
               <a:rPr kumimoji="1" lang="ja-JP" altLang="en-US" smtClean="0"/>
-              <a:t>2026/6/4</a:t>
+              <a:t>2026/6/24</a:t>
             </a:fld>
             <a:endParaRPr kumimoji="1" lang="ja-JP" altLang="en-US"/>
           </a:p>
@@ -509,7 +509,7 @@
           <a:p>
             <a:fld id="{E9CC885B-4903-4D54-9A93-00025F12DED9}" type="datetimeFigureOut">
               <a:rPr kumimoji="1" lang="ja-JP" altLang="en-US" smtClean="0"/>
-              <a:t>2026/6/4</a:t>
+              <a:t>2026/6/24</a:t>
             </a:fld>
             <a:endParaRPr kumimoji="1" lang="ja-JP" altLang="en-US"/>
           </a:p>
@@ -749,7 +749,7 @@
           <a:p>
             <a:fld id="{E9CC885B-4903-4D54-9A93-00025F12DED9}" type="datetimeFigureOut">
               <a:rPr kumimoji="1" lang="ja-JP" altLang="en-US" smtClean="0"/>
-              <a:t>2026/6/4</a:t>
+              <a:t>2026/6/24</a:t>
             </a:fld>
             <a:endParaRPr kumimoji="1" lang="ja-JP" altLang="en-US"/>
           </a:p>
@@ -979,7 +979,7 @@
           <a:p>
             <a:fld id="{E9CC885B-4903-4D54-9A93-00025F12DED9}" type="datetimeFigureOut">
               <a:rPr kumimoji="1" lang="ja-JP" altLang="en-US" smtClean="0"/>
-              <a:t>2026/6/4</a:t>
+              <a:t>2026/6/24</a:t>
             </a:fld>
             <a:endParaRPr kumimoji="1" lang="ja-JP" altLang="en-US"/>
           </a:p>
@@ -1254,7 +1254,7 @@
           <a:p>
             <a:fld id="{E9CC885B-4903-4D54-9A93-00025F12DED9}" type="datetimeFigureOut">
               <a:rPr kumimoji="1" lang="ja-JP" altLang="en-US" smtClean="0"/>
-              <a:t>2026/6/4</a:t>
+              <a:t>2026/6/24</a:t>
             </a:fld>
             <a:endParaRPr kumimoji="1" lang="ja-JP" altLang="en-US"/>
           </a:p>
@@ -1583,7 +1583,7 @@
           <a:p>
             <a:fld id="{E9CC885B-4903-4D54-9A93-00025F12DED9}" type="datetimeFigureOut">
               <a:rPr kumimoji="1" lang="ja-JP" altLang="en-US" smtClean="0"/>
-              <a:t>2026/6/4</a:t>
+              <a:t>2026/6/24</a:t>
             </a:fld>
             <a:endParaRPr kumimoji="1" lang="ja-JP" altLang="en-US"/>
           </a:p>
@@ -2059,7 +2059,7 @@
           <a:p>
             <a:fld id="{E9CC885B-4903-4D54-9A93-00025F12DED9}" type="datetimeFigureOut">
               <a:rPr kumimoji="1" lang="ja-JP" altLang="en-US" smtClean="0"/>
-              <a:t>2026/6/4</a:t>
+              <a:t>2026/6/24</a:t>
             </a:fld>
             <a:endParaRPr kumimoji="1" lang="ja-JP" altLang="en-US"/>
           </a:p>
@@ -2200,7 +2200,7 @@
           <a:p>
             <a:fld id="{E9CC885B-4903-4D54-9A93-00025F12DED9}" type="datetimeFigureOut">
               <a:rPr kumimoji="1" lang="ja-JP" altLang="en-US" smtClean="0"/>
-              <a:t>2026/6/4</a:t>
+              <a:t>2026/6/24</a:t>
             </a:fld>
             <a:endParaRPr kumimoji="1" lang="ja-JP" altLang="en-US"/>
           </a:p>
@@ -2313,7 +2313,7 @@
           <a:p>
             <a:fld id="{E9CC885B-4903-4D54-9A93-00025F12DED9}" type="datetimeFigureOut">
               <a:rPr kumimoji="1" lang="ja-JP" altLang="en-US" smtClean="0"/>
-              <a:t>2026/6/4</a:t>
+              <a:t>2026/6/24</a:t>
             </a:fld>
             <a:endParaRPr kumimoji="1" lang="ja-JP" altLang="en-US"/>
           </a:p>
@@ -2656,7 +2656,7 @@
           <a:p>
             <a:fld id="{E9CC885B-4903-4D54-9A93-00025F12DED9}" type="datetimeFigureOut">
               <a:rPr kumimoji="1" lang="ja-JP" altLang="en-US" smtClean="0"/>
-              <a:t>2026/6/4</a:t>
+              <a:t>2026/6/24</a:t>
             </a:fld>
             <a:endParaRPr kumimoji="1" lang="ja-JP" altLang="en-US"/>
           </a:p>
@@ -2944,7 +2944,7 @@
           <a:p>
             <a:fld id="{E9CC885B-4903-4D54-9A93-00025F12DED9}" type="datetimeFigureOut">
               <a:rPr kumimoji="1" lang="ja-JP" altLang="en-US" smtClean="0"/>
-              <a:t>2026/6/4</a:t>
+              <a:t>2026/6/24</a:t>
             </a:fld>
             <a:endParaRPr kumimoji="1" lang="ja-JP" altLang="en-US"/>
           </a:p>
@@ -3217,7 +3217,7 @@
           <a:p>
             <a:fld id="{E9CC885B-4903-4D54-9A93-00025F12DED9}" type="datetimeFigureOut">
               <a:rPr kumimoji="1" lang="ja-JP" altLang="en-US" smtClean="0"/>
-              <a:t>2026/6/4</a:t>
+              <a:t>2026/6/24</a:t>
             </a:fld>
             <a:endParaRPr kumimoji="1" lang="ja-JP" altLang="en-US"/>
           </a:p>
@@ -4243,7 +4243,7 @@
         <p:spPr>
           <a:xfrm>
             <a:off x="567542" y="1216429"/>
-            <a:ext cx="9621545" cy="830997"/>
+            <a:ext cx="9929321" cy="830997"/>
           </a:xfrm>
           <a:prstGeom prst="rect">
             <a:avLst/>
@@ -4301,7 +4301,7 @@
                   <a:srgbClr val="FF0000"/>
                 </a:solidFill>
               </a:rPr>
-              <a:t>分の条件部分）</a:t>
+              <a:t>文の条件部分）</a:t>
             </a:r>
             <a:endParaRPr kumimoji="1" lang="en-US" altLang="ja-JP" sz="2400" dirty="0"/>
           </a:p>
@@ -4423,7 +4423,7 @@
         <p:spPr>
           <a:xfrm>
             <a:off x="567542" y="1216429"/>
-            <a:ext cx="8238153" cy="1200329"/>
+            <a:ext cx="7263527" cy="461665"/>
           </a:xfrm>
           <a:prstGeom prst="rect">
             <a:avLst/>
@@ -4439,40 +4439,6 @@
             <a:r>
               <a:rPr kumimoji="1" lang="ja-JP" altLang="en-US" sz="2400" dirty="0"/>
               <a:t>動作確認して正しく操作できるか確認しましょう。</a:t>
-            </a:r>
-            <a:endParaRPr kumimoji="1" lang="en-US" altLang="ja-JP" sz="2400" dirty="0"/>
-          </a:p>
-          <a:p>
-            <a:r>
-              <a:rPr lang="ja-JP" altLang="en-US" sz="2400" dirty="0"/>
-              <a:t>また、いずれかのキー入力を</a:t>
-            </a:r>
-            <a:r>
-              <a:rPr lang="en-US" altLang="ja-JP" sz="2400" b="1" dirty="0" err="1">
-                <a:solidFill>
-                  <a:srgbClr val="FF0000"/>
-                </a:solidFill>
-              </a:rPr>
-              <a:t>IsTriggerKey</a:t>
-            </a:r>
-            <a:r>
-              <a:rPr lang="ja-JP" altLang="en-US" sz="2400" b="1" dirty="0">
-                <a:solidFill>
-                  <a:srgbClr val="FF0000"/>
-                </a:solidFill>
-              </a:rPr>
-              <a:t>関数</a:t>
-            </a:r>
-            <a:r>
-              <a:rPr lang="ja-JP" altLang="en-US" sz="2400" dirty="0"/>
-              <a:t>に変えて、</a:t>
-            </a:r>
-            <a:endParaRPr lang="en-US" altLang="ja-JP" sz="2400" dirty="0"/>
-          </a:p>
-          <a:p>
-            <a:r>
-              <a:rPr kumimoji="1" lang="ja-JP" altLang="en-US" sz="2400" dirty="0"/>
-              <a:t>挙動を確認してみましょう。</a:t>
             </a:r>
             <a:endParaRPr kumimoji="1" lang="en-US" altLang="ja-JP" sz="2400" dirty="0"/>
           </a:p>
@@ -4506,7 +4472,7 @@
         </p:blipFill>
         <p:spPr>
           <a:xfrm>
-            <a:off x="567542" y="2556458"/>
+            <a:off x="567542" y="1817794"/>
             <a:ext cx="6324600" cy="3557588"/>
           </a:xfrm>
           <a:prstGeom prst="rect">
@@ -4514,6 +4480,42 @@
           </a:prstGeom>
         </p:spPr>
       </p:pic>
+      <p:sp>
+        <p:nvSpPr>
+          <p:cNvPr id="7" name="テキスト ボックス 6">
+            <a:extLst>
+              <a:ext uri="{FF2B5EF4-FFF2-40B4-BE49-F238E27FC236}">
+                <a16:creationId xmlns:a16="http://schemas.microsoft.com/office/drawing/2014/main" id="{8AA436FE-E92C-40B0-9BDE-503A7488C2D1}"/>
+              </a:ext>
+            </a:extLst>
+          </p:cNvPr>
+          <p:cNvSpPr txBox="1"/>
+          <p:nvPr/>
+        </p:nvSpPr>
+        <p:spPr>
+          <a:xfrm>
+            <a:off x="567541" y="5515082"/>
+            <a:ext cx="3877985" cy="461665"/>
+          </a:xfrm>
+          <a:prstGeom prst="rect">
+            <a:avLst/>
+          </a:prstGeom>
+          <a:noFill/>
+        </p:spPr>
+        <p:txBody>
+          <a:bodyPr wrap="none" rtlCol="0">
+            <a:spAutoFit/>
+          </a:bodyPr>
+          <a:lstStyle/>
+          <a:p>
+            <a:r>
+              <a:rPr kumimoji="1" lang="ja-JP" altLang="en-US" sz="2400" dirty="0"/>
+              <a:t>ちょっと想定と違うかも？</a:t>
+            </a:r>
+            <a:endParaRPr kumimoji="1" lang="en-US" altLang="ja-JP" sz="2400" dirty="0"/>
+          </a:p>
+        </p:txBody>
+      </p:sp>
     </p:spTree>
     <p:extLst>
       <p:ext uri="{BB962C8B-B14F-4D97-AF65-F5344CB8AC3E}">
@@ -5143,7 +5145,7 @@
                   <a:srgbClr val="FF0000"/>
                 </a:solidFill>
               </a:rPr>
-              <a:t>ステップ処理でも移動量を</a:t>
+              <a:t>ステップ処理で移動量を</a:t>
             </a:r>
             <a:r>
               <a:rPr kumimoji="1" lang="en-US" altLang="ja-JP" sz="2400" b="1" dirty="0">
